--- a/08-AI_CAMPUS-main/os-day3/운영체제_Day3.pptx
+++ b/08-AI_CAMPUS-main/os-day3/운영체제_Day3.pptx
@@ -4498,7 +4498,7 @@
                 <a:ea typeface="Courier New" pitchFamily="34" charset="-122"/>
                 <a:cs typeface="Courier New" pitchFamily="34" charset="-120"/>
               </a:rPr>
-              <a:t>기본 주소  https://imguru-mooc.github.io/AI_CAMPUS/os-day3/anim/</a:t>
+              <a:t>기본 주소  https://devops0906.github.io/AI_CAMPUS/os-day3/anim/</a:t>
             </a:r>
             <a:endParaRPr lang="en-US" sz="1100" dirty="0"/>
           </a:p>
